--- a/exports/学生实习赋能计划_可行性论证方案.pptx
+++ b/exports/学生实习赋能计划_可行性论证方案.pptx
@@ -3410,7 +3410,7 @@
                 <a:latin typeface="微软雅黑"/>
                 <a:ea typeface="微软雅黑"/>
               </a:rPr>
-              <a:t>商业实习项目 × 公益补充服务  |  定价机制与盈利测算  |  PPT + Excel 双交付</a:t>
+              <a:t>商业企业课题实习 × 就业转化  |  定价机制与盈利测算  |  PPT + Excel 双交付</a:t>
             </a:r>
           </a:p>
         </p:txBody>
@@ -4560,7 +4560,7 @@
                 <a:latin typeface="微软雅黑"/>
                 <a:ea typeface="微软雅黑"/>
               </a:rPr>
-              <a:t>五、公益类实习与增值支持</a:t>
+              <a:t>五、战略取舍：取消「开证明」业务</a:t>
             </a:r>
           </a:p>
         </p:txBody>
@@ -4596,7 +4596,7 @@
                 <a:latin typeface="微软雅黑"/>
                 <a:ea typeface="微软雅黑"/>
               </a:rPr>
-              <a:t>补充点：低门槛获客 + 证明服务闭环</a:t>
+              <a:t>费用低、成本与风险高 → 不如聚焦更高价值业务</a:t>
             </a:r>
           </a:p>
         </p:txBody>
@@ -4742,7 +4742,7 @@
             <a:avLst/>
           </a:prstGeom>
           <a:solidFill>
-            <a:srgbClr val="1A7A6D"/>
+            <a:srgbClr val="B54A4A"/>
           </a:solidFill>
           <a:ln>
             <a:noFill/>
@@ -4797,12 +4797,12 @@
             <a:r>
               <a:rPr sz="1400" b="1">
                 <a:solidFill>
-                  <a:srgbClr val="1A7A6D"/>
-                </a:solidFill>
-                <a:latin typeface="微软雅黑"/>
-                <a:ea typeface="微软雅黑"/>
-              </a:rPr>
-              <a:t>(a) 线上实习盖证明</a:t>
+                  <a:srgbClr val="B54A4A"/>
+                </a:solidFill>
+                <a:latin typeface="微软雅黑"/>
+                <a:ea typeface="微软雅黑"/>
+              </a:rPr>
+              <a:t>停售档位</a:t>
             </a:r>
           </a:p>
         </p:txBody>
@@ -4835,14 +4835,14 @@
               </a:lnSpc>
             </a:pPr>
             <a:r>
-              <a:rPr sz="1100" b="0">
+              <a:rPr sz="1300" b="0">
                 <a:solidFill>
                   <a:srgbClr val="1A2A33"/>
                 </a:solidFill>
                 <a:latin typeface="微软雅黑"/>
                 <a:ea typeface="微软雅黑"/>
               </a:rPr>
-              <a:t>•  统一线上任务平台</a:t>
+              <a:t>•  199 元：线上实习·证明版</a:t>
             </a:r>
           </a:p>
           <a:p>
@@ -4852,14 +4852,14 @@
               </a:lnSpc>
             </a:pPr>
             <a:r>
-              <a:rPr sz="1100" b="0">
+              <a:rPr sz="1300" b="0">
                 <a:solidFill>
                   <a:srgbClr val="1A2A33"/>
                 </a:solidFill>
                 <a:latin typeface="微软雅黑"/>
                 <a:ea typeface="微软雅黑"/>
               </a:rPr>
-              <a:t>•  每周打卡 + 成果提交</a:t>
+              <a:t>•  699 元：证明 + 申报支持</a:t>
             </a:r>
           </a:p>
           <a:p>
@@ -4869,14 +4869,14 @@
               </a:lnSpc>
             </a:pPr>
             <a:r>
-              <a:rPr sz="1100" b="0">
+              <a:rPr sz="1300" b="0">
                 <a:solidFill>
                   <a:srgbClr val="1A2A33"/>
                 </a:solidFill>
                 <a:latin typeface="微软雅黑"/>
                 <a:ea typeface="微软雅黑"/>
               </a:rPr>
-              <a:t>•  导师轻量批改</a:t>
+              <a:t>•  1,680 元：证明 + 推荐信协助</a:t>
             </a:r>
           </a:p>
           <a:p>
@@ -4886,14 +4886,14 @@
               </a:lnSpc>
             </a:pPr>
             <a:r>
-              <a:rPr sz="1100" b="0">
+              <a:rPr sz="1300" b="0">
                 <a:solidFill>
                   <a:srgbClr val="1A2A33"/>
                 </a:solidFill>
                 <a:latin typeface="微软雅黑"/>
                 <a:ea typeface="微软雅黑"/>
               </a:rPr>
-              <a:t>•  结业出具标准证明</a:t>
+              <a:t>•  以上三档一律取消、不再报价</a:t>
             </a:r>
           </a:p>
           <a:p>
@@ -4903,31 +4903,14 @@
               </a:lnSpc>
             </a:pPr>
             <a:r>
-              <a:rPr sz="1100" b="0">
+              <a:rPr sz="1300" b="0">
                 <a:solidFill>
                   <a:srgbClr val="1A2A33"/>
                 </a:solidFill>
                 <a:latin typeface="微软雅黑"/>
                 <a:ea typeface="微软雅黑"/>
               </a:rPr>
-              <a:t>•  可抽查核验编号</a:t>
-            </a:r>
-          </a:p>
-          <a:p>
-            <a:pPr algn="l">
-              <a:lnSpc>
-                <a:spcPct val="125000"/>
-              </a:lnSpc>
-            </a:pPr>
-            <a:r>
-              <a:rPr sz="1100" b="0">
-                <a:solidFill>
-                  <a:srgbClr val="1A2A33"/>
-                </a:solidFill>
-                <a:latin typeface="微软雅黑"/>
-                <a:ea typeface="微软雅黑"/>
-              </a:rPr>
-              <a:t>•  适合高中生与基础层</a:t>
+              <a:t>•  不再以「盖章证明」作为获客入口</a:t>
             </a:r>
           </a:p>
         </p:txBody>
@@ -4993,7 +4976,7 @@
             <a:avLst/>
           </a:prstGeom>
           <a:solidFill>
-            <a:srgbClr val="0B3D5C"/>
+            <a:srgbClr val="C06A2F"/>
           </a:solidFill>
           <a:ln>
             <a:noFill/>
@@ -5048,12 +5031,12 @@
             <a:r>
               <a:rPr sz="1400" b="1">
                 <a:solidFill>
-                  <a:srgbClr val="0B3D5C"/>
-                </a:solidFill>
-                <a:latin typeface="微软雅黑"/>
-                <a:ea typeface="微软雅黑"/>
-              </a:rPr>
-              <a:t>(b) 申报邮箱与链接</a:t>
+                  <a:srgbClr val="C06A2F"/>
+                </a:solidFill>
+                <a:latin typeface="微软雅黑"/>
+                <a:ea typeface="微软雅黑"/>
+              </a:rPr>
+              <a:t>为什么取消</a:t>
             </a:r>
           </a:p>
         </p:txBody>
@@ -5086,14 +5069,14 @@
               </a:lnSpc>
             </a:pPr>
             <a:r>
-              <a:rPr sz="1100" b="0">
+              <a:rPr sz="1300" b="0">
                 <a:solidFill>
                   <a:srgbClr val="1A2A33"/>
                 </a:solidFill>
                 <a:latin typeface="微软雅黑"/>
                 <a:ea typeface="微软雅黑"/>
               </a:rPr>
-              <a:t>•  提供申报专用邮箱</a:t>
+              <a:t>•  客单价过低，难以覆盖真实交付</a:t>
             </a:r>
           </a:p>
           <a:p>
@@ -5103,14 +5086,14 @@
               </a:lnSpc>
             </a:pPr>
             <a:r>
-              <a:rPr sz="1100" b="0">
+              <a:rPr sz="1300" b="0">
                 <a:solidFill>
                   <a:srgbClr val="1A2A33"/>
                 </a:solidFill>
                 <a:latin typeface="微软雅黑"/>
                 <a:ea typeface="微软雅黑"/>
               </a:rPr>
-              <a:t>•  材料清单与截止提醒</a:t>
+              <a:t>•  核验、客服、舆情与合规成本偏高</a:t>
             </a:r>
           </a:p>
           <a:p>
@@ -5120,14 +5103,14 @@
               </a:lnSpc>
             </a:pPr>
             <a:r>
-              <a:rPr sz="1100" b="0">
+              <a:rPr sz="1300" b="0">
                 <a:solidFill>
                   <a:srgbClr val="1A2A33"/>
                 </a:solidFill>
                 <a:latin typeface="微软雅黑"/>
                 <a:ea typeface="微软雅黑"/>
               </a:rPr>
-              <a:t>•  常见问题知识库</a:t>
+              <a:t>•  易被归类为「水经历」，伤品牌</a:t>
             </a:r>
           </a:p>
           <a:p>
@@ -5137,14 +5120,14 @@
               </a:lnSpc>
             </a:pPr>
             <a:r>
-              <a:rPr sz="1100" b="0">
+              <a:rPr sz="1300" b="0">
                 <a:solidFill>
                   <a:srgbClr val="1A2A33"/>
                 </a:solidFill>
                 <a:latin typeface="微软雅黑"/>
                 <a:ea typeface="微软雅黑"/>
               </a:rPr>
-              <a:t>•  学校/机构对接模板</a:t>
+              <a:t>•  占用企业对接与教务带宽</a:t>
             </a:r>
           </a:p>
           <a:p>
@@ -5154,31 +5137,14 @@
               </a:lnSpc>
             </a:pPr>
             <a:r>
-              <a:rPr sz="1100" b="0">
+              <a:rPr sz="1300" b="0">
                 <a:solidFill>
                   <a:srgbClr val="1A2A33"/>
                 </a:solidFill>
                 <a:latin typeface="微软雅黑"/>
                 <a:ea typeface="微软雅黑"/>
               </a:rPr>
-              <a:t>•  进度可查询</a:t>
-            </a:r>
-          </a:p>
-          <a:p>
-            <a:pPr algn="l">
-              <a:lnSpc>
-                <a:spcPct val="125000"/>
-              </a:lnSpc>
-            </a:pPr>
-            <a:r>
-              <a:rPr sz="1100" b="0">
-                <a:solidFill>
-                  <a:srgbClr val="1A2A33"/>
-                </a:solidFill>
-                <a:latin typeface="微软雅黑"/>
-                <a:ea typeface="微软雅黑"/>
-              </a:rPr>
-              <a:t>•  降低家长操作成本</a:t>
+              <a:t>•  机会成本：同样精力可售 5,480+</a:t>
             </a:r>
           </a:p>
         </p:txBody>
@@ -5244,7 +5210,7 @@
             <a:avLst/>
           </a:prstGeom>
           <a:solidFill>
-            <a:srgbClr val="C06A2F"/>
+            <a:srgbClr val="1A7A6D"/>
           </a:solidFill>
           <a:ln>
             <a:noFill/>
@@ -5299,12 +5265,12 @@
             <a:r>
               <a:rPr sz="1400" b="1">
                 <a:solidFill>
-                  <a:srgbClr val="C06A2F"/>
-                </a:solidFill>
-                <a:latin typeface="微软雅黑"/>
-                <a:ea typeface="微软雅黑"/>
-              </a:rPr>
-              <a:t>(c) 推荐信等支持</a:t>
+                  <a:srgbClr val="1A7A6D"/>
+                </a:solidFill>
+                <a:latin typeface="微软雅黑"/>
+                <a:ea typeface="微软雅黑"/>
+              </a:rPr>
+              <a:t>改为做什么</a:t>
             </a:r>
           </a:p>
         </p:txBody>
@@ -5337,14 +5303,14 @@
               </a:lnSpc>
             </a:pPr>
             <a:r>
-              <a:rPr sz="1100" b="0">
+              <a:rPr sz="1300" b="0">
                 <a:solidFill>
                   <a:srgbClr val="1A2A33"/>
                 </a:solidFill>
                 <a:latin typeface="微软雅黑"/>
                 <a:ea typeface="微软雅黑"/>
               </a:rPr>
-              <a:t>•  推荐信结构模板</a:t>
+              <a:t>•  主推具身/科技项目 5,480</a:t>
             </a:r>
           </a:p>
           <a:p>
@@ -5354,14 +5320,14 @@
               </a:lnSpc>
             </a:pPr>
             <a:r>
-              <a:rPr sz="1100" b="0">
+              <a:rPr sz="1300" b="0">
                 <a:solidFill>
                   <a:srgbClr val="1A2A33"/>
                 </a:solidFill>
                 <a:latin typeface="微软雅黑"/>
                 <a:ea typeface="微软雅黑"/>
               </a:rPr>
-              <a:t>•  中英文版本可选</a:t>
+              <a:t>•  上海 AI / 头部通道 11,800</a:t>
             </a:r>
           </a:p>
           <a:p>
@@ -5371,14 +5337,14 @@
               </a:lnSpc>
             </a:pPr>
             <a:r>
-              <a:rPr sz="1100" b="0">
+              <a:rPr sz="1300" b="0">
                 <a:solidFill>
                   <a:srgbClr val="1A2A33"/>
                 </a:solidFill>
                 <a:latin typeface="微软雅黑"/>
                 <a:ea typeface="微软雅黑"/>
               </a:rPr>
-              <a:t>•  导师签名流程</a:t>
+              <a:t>•  毕业生就业包 9,800</a:t>
             </a:r>
           </a:p>
           <a:p>
@@ -5388,14 +5354,14 @@
               </a:lnSpc>
             </a:pPr>
             <a:r>
-              <a:rPr sz="1100" b="0">
+              <a:rPr sz="1300" b="0">
                 <a:solidFill>
                   <a:srgbClr val="1A2A33"/>
                 </a:solidFill>
                 <a:latin typeface="微软雅黑"/>
                 <a:ea typeface="微软雅黑"/>
               </a:rPr>
-              <a:t>•  文书要点辅导（增值）</a:t>
+              <a:t>•  证明仅随项目结业交付</a:t>
             </a:r>
           </a:p>
           <a:p>
@@ -5405,31 +5371,14 @@
               </a:lnSpc>
             </a:pPr>
             <a:r>
-              <a:rPr sz="1100" b="0">
+              <a:rPr sz="1300" b="0">
                 <a:solidFill>
                   <a:srgbClr val="1A2A33"/>
                 </a:solidFill>
                 <a:latin typeface="微软雅黑"/>
                 <a:ea typeface="微软雅黑"/>
               </a:rPr>
-              <a:t>•  与公益套餐打包</a:t>
-            </a:r>
-          </a:p>
-          <a:p>
-            <a:pPr algn="l">
-              <a:lnSpc>
-                <a:spcPct val="125000"/>
-              </a:lnSpc>
-            </a:pPr>
-            <a:r>
-              <a:rPr sz="1100" b="0">
-                <a:solidFill>
-                  <a:srgbClr val="1A2A33"/>
-                </a:solidFill>
-                <a:latin typeface="微软雅黑"/>
-                <a:ea typeface="微软雅黑"/>
-              </a:rPr>
-              <a:t>•  升级可转商业导师班</a:t>
+              <a:t>•  推荐信仅项目学员加购</a:t>
             </a:r>
           </a:p>
         </p:txBody>
@@ -5607,7 +5556,7 @@
                 <a:latin typeface="微软雅黑"/>
                 <a:ea typeface="微软雅黑"/>
               </a:rPr>
-              <a:t>分层套餐，覆盖三类人群支付能力</a:t>
+              <a:t>只保留高价值档，保护单价与品牌</a:t>
             </a:r>
           </a:p>
         </p:txBody>
@@ -5702,7 +5651,7 @@
         </p:nvGraphicFramePr>
         <p:xfrm>
           <a:off x="320040" y="1325880"/>
-          <a:ext cx="11521440" cy="4754880"/>
+          <a:ext cx="11521440" cy="3840480"/>
         </p:xfrm>
         <a:graphic>
           <a:graphicData uri="http://schemas.openxmlformats.org/drawingml/2006/table">
@@ -5717,7 +5666,7 @@
                 <a:gridCol w="2304288"/>
                 <a:gridCol w="2304288"/>
               </a:tblGrid>
-              <a:tr h="594360">
+              <a:tr h="640080">
                 <a:tc>
                   <a:txBody>
                     <a:bodyPr/>
@@ -5725,7 +5674,7 @@
                     <a:p>
                       <a:pPr algn="ctr"/>
                       <a:r>
-                        <a:rPr sz="1200" b="1">
+                        <a:rPr sz="1300" b="1">
                           <a:solidFill>
                             <a:srgbClr val="FFFFFF"/>
                           </a:solidFill>
@@ -5749,7 +5698,7 @@
                     <a:p>
                       <a:pPr algn="ctr"/>
                       <a:r>
-                        <a:rPr sz="1200" b="1">
+                        <a:rPr sz="1300" b="1">
                           <a:solidFill>
                             <a:srgbClr val="FFFFFF"/>
                           </a:solidFill>
@@ -5773,7 +5722,7 @@
                     <a:p>
                       <a:pPr algn="ctr"/>
                       <a:r>
-                        <a:rPr sz="1200" b="1">
+                        <a:rPr sz="1300" b="1">
                           <a:solidFill>
                             <a:srgbClr val="FFFFFF"/>
                           </a:solidFill>
@@ -5797,7 +5746,7 @@
                     <a:p>
                       <a:pPr algn="ctr"/>
                       <a:r>
-                        <a:rPr sz="1200" b="1">
+                        <a:rPr sz="1300" b="1">
                           <a:solidFill>
                             <a:srgbClr val="FFFFFF"/>
                           </a:solidFill>
@@ -5821,7 +5770,7 @@
                     <a:p>
                       <a:pPr algn="ctr"/>
                       <a:r>
-                        <a:rPr sz="1200" b="1">
+                        <a:rPr sz="1300" b="1">
                           <a:solidFill>
                             <a:srgbClr val="FFFFFF"/>
                           </a:solidFill>
@@ -5839,7 +5788,7 @@
                   </a:tcPr>
                 </a:tc>
               </a:tr>
-              <a:tr h="594360">
+              <a:tr h="640080">
                 <a:tc>
                   <a:txBody>
                     <a:bodyPr wrap="square"/>
@@ -5847,14 +5796,14 @@
                     <a:p>
                       <a:pPr algn="l"/>
                       <a:r>
-                        <a:rPr sz="1100" b="0">
+                        <a:rPr sz="1200" b="0">
                           <a:solidFill>
                             <a:srgbClr val="1A2A33"/>
                           </a:solidFill>
                           <a:latin typeface="微软雅黑"/>
                           <a:ea typeface="微软雅黑"/>
                         </a:rPr>
-                        <a:t>公益基础</a:t>
+                        <a:t>商业标准</a:t>
                       </a:r>
                     </a:p>
                   </a:txBody>
@@ -5871,14 +5820,14 @@
                     <a:p>
                       <a:pPr algn="l"/>
                       <a:r>
-                        <a:rPr sz="1100" b="0">
+                        <a:rPr sz="1200" b="0">
                           <a:solidFill>
                             <a:srgbClr val="1A2A33"/>
                           </a:solidFill>
                           <a:latin typeface="微软雅黑"/>
                           <a:ea typeface="微软雅黑"/>
                         </a:rPr>
-                        <a:t>线上实习 · 证明版</a:t>
+                        <a:t>科技/具身智能项目实习</a:t>
                       </a:r>
                     </a:p>
                   </a:txBody>
@@ -5895,14 +5844,14 @@
                     <a:p>
                       <a:pPr algn="l"/>
                       <a:r>
-                        <a:rPr sz="1100" b="0">
+                        <a:rPr sz="1200" b="0">
                           <a:solidFill>
                             <a:srgbClr val="1A2A33"/>
                           </a:solidFill>
                           <a:latin typeface="微软雅黑"/>
                           <a:ea typeface="微软雅黑"/>
                         </a:rPr>
-                        <a:t>0–299</a:t>
+                        <a:t>3,980–6,980（标准 5,480）</a:t>
                       </a:r>
                     </a:p>
                   </a:txBody>
@@ -5919,14 +5868,14 @@
                     <a:p>
                       <a:pPr algn="l"/>
                       <a:r>
-                        <a:rPr sz="1100" b="0">
+                        <a:rPr sz="1200" b="0">
                           <a:solidFill>
                             <a:srgbClr val="1A2A33"/>
                           </a:solidFill>
                           <a:latin typeface="微软雅黑"/>
                           <a:ea typeface="微软雅黑"/>
                         </a:rPr>
-                        <a:t>任务+证明编号</a:t>
+                        <a:t>4–6周真实课题+周报+结业证明</a:t>
                       </a:r>
                     </a:p>
                   </a:txBody>
@@ -5943,14 +5892,14 @@
                     <a:p>
                       <a:pPr algn="l"/>
                       <a:r>
-                        <a:rPr sz="1100" b="0">
+                        <a:rPr sz="1200" b="0">
                           <a:solidFill>
                             <a:srgbClr val="1A2A33"/>
                           </a:solidFill>
                           <a:latin typeface="微软雅黑"/>
                           <a:ea typeface="微软雅黑"/>
                         </a:rPr>
-                        <a:t>高中生/预算敏感</a:t>
+                        <a:t>高中优生/大学生</a:t>
                       </a:r>
                     </a:p>
                   </a:txBody>
@@ -5961,7 +5910,7 @@
                   </a:tcPr>
                 </a:tc>
               </a:tr>
-              <a:tr h="594360">
+              <a:tr h="640080">
                 <a:tc>
                   <a:txBody>
                     <a:bodyPr wrap="square"/>
@@ -5969,14 +5918,14 @@
                     <a:p>
                       <a:pPr algn="l"/>
                       <a:r>
-                        <a:rPr sz="1100" b="0">
+                        <a:rPr sz="1200" b="0">
                           <a:solidFill>
                             <a:srgbClr val="1A2A33"/>
                           </a:solidFill>
                           <a:latin typeface="微软雅黑"/>
                           <a:ea typeface="微软雅黑"/>
                         </a:rPr>
-                        <a:t>公益增值</a:t>
+                        <a:t>商业进阶</a:t>
                       </a:r>
                     </a:p>
                   </a:txBody>
@@ -5993,14 +5942,14 @@
                     <a:p>
                       <a:pPr algn="l"/>
                       <a:r>
-                        <a:rPr sz="1100" b="0">
+                        <a:rPr sz="1200" b="0">
                           <a:solidFill>
                             <a:srgbClr val="1A2A33"/>
                           </a:solidFill>
                           <a:latin typeface="微软雅黑"/>
                           <a:ea typeface="微软雅黑"/>
                         </a:rPr>
-                        <a:t>证明 + 申报支持</a:t>
+                        <a:t>上海 AI / 大厂通道营</a:t>
                       </a:r>
                     </a:p>
                   </a:txBody>
@@ -6017,14 +5966,14 @@
                     <a:p>
                       <a:pPr algn="l"/>
                       <a:r>
-                        <a:rPr sz="1100" b="0">
+                        <a:rPr sz="1200" b="0">
                           <a:solidFill>
                             <a:srgbClr val="1A2A33"/>
                           </a:solidFill>
                           <a:latin typeface="微软雅黑"/>
                           <a:ea typeface="微软雅黑"/>
                         </a:rPr>
-                        <a:t>499–899</a:t>
+                        <a:t>8,800–15,800（标准 11,800）</a:t>
                       </a:r>
                     </a:p>
                   </a:txBody>
@@ -6041,14 +5990,14 @@
                     <a:p>
                       <a:pPr algn="l"/>
                       <a:r>
-                        <a:rPr sz="1100" b="0">
+                        <a:rPr sz="1200" b="0">
                           <a:solidFill>
                             <a:srgbClr val="1A2A33"/>
                           </a:solidFill>
                           <a:latin typeface="微软雅黑"/>
                           <a:ea typeface="微软雅黑"/>
                         </a:rPr>
-                        <a:t>邮箱通道+材料清单</a:t>
+                        <a:t>品牌项目+导师+答辩+证明</a:t>
                       </a:r>
                     </a:p>
                   </a:txBody>
@@ -6065,14 +6014,14 @@
                     <a:p>
                       <a:pPr algn="l"/>
                       <a:r>
-                        <a:rPr sz="1100" b="0">
+                        <a:rPr sz="1200" b="0">
                           <a:solidFill>
                             <a:srgbClr val="1A2A33"/>
                           </a:solidFill>
                           <a:latin typeface="微软雅黑"/>
                           <a:ea typeface="微软雅黑"/>
                         </a:rPr>
-                        <a:t>高中申请党</a:t>
+                        <a:t>大学生/优生</a:t>
                       </a:r>
                     </a:p>
                   </a:txBody>
@@ -6083,7 +6032,7 @@
                   </a:tcPr>
                 </a:tc>
               </a:tr>
-              <a:tr h="594360">
+              <a:tr h="640080">
                 <a:tc>
                   <a:txBody>
                     <a:bodyPr wrap="square"/>
@@ -6091,14 +6040,14 @@
                     <a:p>
                       <a:pPr algn="l"/>
                       <a:r>
-                        <a:rPr sz="1100" b="0">
+                        <a:rPr sz="1200" b="0">
                           <a:solidFill>
                             <a:srgbClr val="1A2A33"/>
                           </a:solidFill>
                           <a:latin typeface="微软雅黑"/>
                           <a:ea typeface="微软雅黑"/>
                         </a:rPr>
-                        <a:t>公益精品</a:t>
+                        <a:t>就业转化</a:t>
                       </a:r>
                     </a:p>
                   </a:txBody>
@@ -6115,14 +6064,14 @@
                     <a:p>
                       <a:pPr algn="l"/>
                       <a:r>
-                        <a:rPr sz="1100" b="0">
+                        <a:rPr sz="1200" b="0">
                           <a:solidFill>
                             <a:srgbClr val="1A2A33"/>
                           </a:solidFill>
                           <a:latin typeface="微软雅黑"/>
                           <a:ea typeface="微软雅黑"/>
                         </a:rPr>
-                        <a:t>证明 + 推荐信协助</a:t>
+                        <a:t>毕业生过渡实习包</a:t>
                       </a:r>
                     </a:p>
                   </a:txBody>
@@ -6139,14 +6088,14 @@
                     <a:p>
                       <a:pPr algn="l"/>
                       <a:r>
-                        <a:rPr sz="1100" b="0">
+                        <a:rPr sz="1200" b="0">
                           <a:solidFill>
                             <a:srgbClr val="1A2A33"/>
                           </a:solidFill>
                           <a:latin typeface="微软雅黑"/>
                           <a:ea typeface="微软雅黑"/>
                         </a:rPr>
-                        <a:t>1,280–1,980</a:t>
+                        <a:t>6,800–12,800（标准 9,800）</a:t>
                       </a:r>
                     </a:p>
                   </a:txBody>
@@ -6163,14 +6112,14 @@
                     <a:p>
                       <a:pPr algn="l"/>
                       <a:r>
-                        <a:rPr sz="1100" b="0">
+                        <a:rPr sz="1200" b="0">
                           <a:solidFill>
                             <a:srgbClr val="1A2A33"/>
                           </a:solidFill>
                           <a:latin typeface="微软雅黑"/>
                           <a:ea typeface="微软雅黑"/>
                         </a:rPr>
-                        <a:t>模板+润色+导师签字流</a:t>
+                        <a:t>实习+内推辅导+复盘+证明</a:t>
                       </a:r>
                     </a:p>
                   </a:txBody>
@@ -6187,14 +6136,14 @@
                     <a:p>
                       <a:pPr algn="l"/>
                       <a:r>
-                        <a:rPr sz="1100" b="0">
+                        <a:rPr sz="1200" b="0">
                           <a:solidFill>
                             <a:srgbClr val="1A2A33"/>
                           </a:solidFill>
                           <a:latin typeface="微软雅黑"/>
                           <a:ea typeface="微软雅黑"/>
                         </a:rPr>
-                        <a:t>海外申请</a:t>
+                        <a:t>毕业生</a:t>
                       </a:r>
                     </a:p>
                   </a:txBody>
@@ -6205,7 +6154,7 @@
                   </a:tcPr>
                 </a:tc>
               </a:tr>
-              <a:tr h="594360">
+              <a:tr h="640080">
                 <a:tc>
                   <a:txBody>
                     <a:bodyPr wrap="square"/>
@@ -6213,14 +6162,14 @@
                     <a:p>
                       <a:pPr algn="l"/>
                       <a:r>
-                        <a:rPr sz="1100" b="0">
+                        <a:rPr sz="1200" b="0">
                           <a:solidFill>
                             <a:srgbClr val="1A2A33"/>
                           </a:solidFill>
                           <a:latin typeface="微软雅黑"/>
                           <a:ea typeface="微软雅黑"/>
                         </a:rPr>
-                        <a:t>商业标准</a:t>
+                        <a:t>增值加购</a:t>
                       </a:r>
                     </a:p>
                   </a:txBody>
@@ -6237,14 +6186,14 @@
                     <a:p>
                       <a:pPr algn="l"/>
                       <a:r>
-                        <a:rPr sz="1100" b="0">
+                        <a:rPr sz="1200" b="0">
                           <a:solidFill>
                             <a:srgbClr val="1A2A33"/>
                           </a:solidFill>
                           <a:latin typeface="微软雅黑"/>
                           <a:ea typeface="微软雅黑"/>
                         </a:rPr>
-                        <a:t>科技公司项目实习</a:t>
+                        <a:t>推荐信（不可单卖）</a:t>
                       </a:r>
                     </a:p>
                   </a:txBody>
@@ -6261,14 +6210,14 @@
                     <a:p>
                       <a:pPr algn="l"/>
                       <a:r>
-                        <a:rPr sz="1100" b="0">
+                        <a:rPr sz="1200" b="0">
                           <a:solidFill>
                             <a:srgbClr val="1A2A33"/>
                           </a:solidFill>
                           <a:latin typeface="微软雅黑"/>
                           <a:ea typeface="微软雅黑"/>
                         </a:rPr>
-                        <a:t>3,980–6,980</a:t>
+                        <a:t>+1,500</a:t>
                       </a:r>
                     </a:p>
                   </a:txBody>
@@ -6285,14 +6234,14 @@
                     <a:p>
                       <a:pPr algn="l"/>
                       <a:r>
-                        <a:rPr sz="1100" b="0">
+                        <a:rPr sz="1200" b="0">
                           <a:solidFill>
                             <a:srgbClr val="1A2A33"/>
                           </a:solidFill>
                           <a:latin typeface="微软雅黑"/>
                           <a:ea typeface="微软雅黑"/>
                         </a:rPr>
-                        <a:t>4–6周项目+证明+周报</a:t>
+                        <a:t>仅限在营/结业项目学员</a:t>
                       </a:r>
                     </a:p>
                   </a:txBody>
@@ -6309,14 +6258,14 @@
                     <a:p>
                       <a:pPr algn="l"/>
                       <a:r>
-                        <a:rPr sz="1100" b="0">
+                        <a:rPr sz="1200" b="0">
                           <a:solidFill>
                             <a:srgbClr val="1A2A33"/>
                           </a:solidFill>
                           <a:latin typeface="微软雅黑"/>
                           <a:ea typeface="微软雅黑"/>
                         </a:rPr>
-                        <a:t>大学生</a:t>
+                        <a:t>有申请需要者</a:t>
                       </a:r>
                     </a:p>
                   </a:txBody>
@@ -6327,7 +6276,7 @@
                   </a:tcPr>
                 </a:tc>
               </a:tr>
-              <a:tr h="594360">
+              <a:tr h="640080">
                 <a:tc>
                   <a:txBody>
                     <a:bodyPr wrap="square"/>
@@ -6335,251 +6284,7 @@
                     <a:p>
                       <a:pPr algn="l"/>
                       <a:r>
-                        <a:rPr sz="1100" b="0">
-                          <a:solidFill>
-                            <a:srgbClr val="1A2A33"/>
-                          </a:solidFill>
-                          <a:latin typeface="微软雅黑"/>
-                          <a:ea typeface="微软雅黑"/>
-                        </a:rPr>
-                        <a:t>商业进阶</a:t>
-                      </a:r>
-                    </a:p>
-                  </a:txBody>
-                  <a:tcPr marL="54864" marR="54864" marT="27432" marB="27432">
-                    <a:solidFill>
-                      <a:srgbClr val="FFFFFF"/>
-                    </a:solidFill>
-                  </a:tcPr>
-                </a:tc>
-                <a:tc>
-                  <a:txBody>
-                    <a:bodyPr wrap="square"/>
-                    <a:lstStyle/>
-                    <a:p>
-                      <a:pPr algn="l"/>
-                      <a:r>
-                        <a:rPr sz="1100" b="0">
-                          <a:solidFill>
-                            <a:srgbClr val="1A2A33"/>
-                          </a:solidFill>
-                          <a:latin typeface="微软雅黑"/>
-                          <a:ea typeface="微软雅黑"/>
-                        </a:rPr>
-                        <a:t>大厂/500强通道营</a:t>
-                      </a:r>
-                    </a:p>
-                  </a:txBody>
-                  <a:tcPr marL="54864" marR="54864" marT="27432" marB="27432">
-                    <a:solidFill>
-                      <a:srgbClr val="FFFFFF"/>
-                    </a:solidFill>
-                  </a:tcPr>
-                </a:tc>
-                <a:tc>
-                  <a:txBody>
-                    <a:bodyPr wrap="square"/>
-                    <a:lstStyle/>
-                    <a:p>
-                      <a:pPr algn="l"/>
-                      <a:r>
-                        <a:rPr sz="1100" b="0">
-                          <a:solidFill>
-                            <a:srgbClr val="1A2A33"/>
-                          </a:solidFill>
-                          <a:latin typeface="微软雅黑"/>
-                          <a:ea typeface="微软雅黑"/>
-                        </a:rPr>
-                        <a:t>8,800–15,800</a:t>
-                      </a:r>
-                    </a:p>
-                  </a:txBody>
-                  <a:tcPr marL="54864" marR="54864" marT="27432" marB="27432">
-                    <a:solidFill>
-                      <a:srgbClr val="FFFFFF"/>
-                    </a:solidFill>
-                  </a:tcPr>
-                </a:tc>
-                <a:tc>
-                  <a:txBody>
-                    <a:bodyPr wrap="square"/>
-                    <a:lstStyle/>
-                    <a:p>
-                      <a:pPr algn="l"/>
-                      <a:r>
-                        <a:rPr sz="1100" b="0">
-                          <a:solidFill>
-                            <a:srgbClr val="1A2A33"/>
-                          </a:solidFill>
-                          <a:latin typeface="微软雅黑"/>
-                          <a:ea typeface="微软雅黑"/>
-                        </a:rPr>
-                        <a:t>品牌项目+导师+答辩</a:t>
-                      </a:r>
-                    </a:p>
-                  </a:txBody>
-                  <a:tcPr marL="54864" marR="54864" marT="27432" marB="27432">
-                    <a:solidFill>
-                      <a:srgbClr val="FFFFFF"/>
-                    </a:solidFill>
-                  </a:tcPr>
-                </a:tc>
-                <a:tc>
-                  <a:txBody>
-                    <a:bodyPr wrap="square"/>
-                    <a:lstStyle/>
-                    <a:p>
-                      <a:pPr algn="l"/>
-                      <a:r>
-                        <a:rPr sz="1100" b="0">
-                          <a:solidFill>
-                            <a:srgbClr val="1A2A33"/>
-                          </a:solidFill>
-                          <a:latin typeface="微软雅黑"/>
-                          <a:ea typeface="微软雅黑"/>
-                        </a:rPr>
-                        <a:t>大学生/优生</a:t>
-                      </a:r>
-                    </a:p>
-                  </a:txBody>
-                  <a:tcPr marL="54864" marR="54864" marT="27432" marB="27432">
-                    <a:solidFill>
-                      <a:srgbClr val="FFFFFF"/>
-                    </a:solidFill>
-                  </a:tcPr>
-                </a:tc>
-              </a:tr>
-              <a:tr h="594360">
-                <a:tc>
-                  <a:txBody>
-                    <a:bodyPr wrap="square"/>
-                    <a:lstStyle/>
-                    <a:p>
-                      <a:pPr algn="l"/>
-                      <a:r>
-                        <a:rPr sz="1100" b="0">
-                          <a:solidFill>
-                            <a:srgbClr val="1A2A33"/>
-                          </a:solidFill>
-                          <a:latin typeface="微软雅黑"/>
-                          <a:ea typeface="微软雅黑"/>
-                        </a:rPr>
-                        <a:t>就业转化</a:t>
-                      </a:r>
-                    </a:p>
-                  </a:txBody>
-                  <a:tcPr marL="54864" marR="54864" marT="27432" marB="27432">
-                    <a:solidFill>
-                      <a:srgbClr val="E8F3F1"/>
-                    </a:solidFill>
-                  </a:tcPr>
-                </a:tc>
-                <a:tc>
-                  <a:txBody>
-                    <a:bodyPr wrap="square"/>
-                    <a:lstStyle/>
-                    <a:p>
-                      <a:pPr algn="l"/>
-                      <a:r>
-                        <a:rPr sz="1100" b="0">
-                          <a:solidFill>
-                            <a:srgbClr val="1A2A33"/>
-                          </a:solidFill>
-                          <a:latin typeface="微软雅黑"/>
-                          <a:ea typeface="微软雅黑"/>
-                        </a:rPr>
-                        <a:t>毕业生过渡实习包</a:t>
-                      </a:r>
-                    </a:p>
-                  </a:txBody>
-                  <a:tcPr marL="54864" marR="54864" marT="27432" marB="27432">
-                    <a:solidFill>
-                      <a:srgbClr val="E8F3F1"/>
-                    </a:solidFill>
-                  </a:tcPr>
-                </a:tc>
-                <a:tc>
-                  <a:txBody>
-                    <a:bodyPr wrap="square"/>
-                    <a:lstStyle/>
-                    <a:p>
-                      <a:pPr algn="l"/>
-                      <a:r>
-                        <a:rPr sz="1100" b="0">
-                          <a:solidFill>
-                            <a:srgbClr val="1A2A33"/>
-                          </a:solidFill>
-                          <a:latin typeface="微软雅黑"/>
-                          <a:ea typeface="微软雅黑"/>
-                        </a:rPr>
-                        <a:t>6,800–12,800</a:t>
-                      </a:r>
-                    </a:p>
-                  </a:txBody>
-                  <a:tcPr marL="54864" marR="54864" marT="27432" marB="27432">
-                    <a:solidFill>
-                      <a:srgbClr val="E8F3F1"/>
-                    </a:solidFill>
-                  </a:tcPr>
-                </a:tc>
-                <a:tc>
-                  <a:txBody>
-                    <a:bodyPr wrap="square"/>
-                    <a:lstStyle/>
-                    <a:p>
-                      <a:pPr algn="l"/>
-                      <a:r>
-                        <a:rPr sz="1100" b="0">
-                          <a:solidFill>
-                            <a:srgbClr val="1A2A33"/>
-                          </a:solidFill>
-                          <a:latin typeface="微软雅黑"/>
-                          <a:ea typeface="微软雅黑"/>
-                        </a:rPr>
-                        <a:t>实习+内推辅导+复盘</a:t>
-                      </a:r>
-                    </a:p>
-                  </a:txBody>
-                  <a:tcPr marL="54864" marR="54864" marT="27432" marB="27432">
-                    <a:solidFill>
-                      <a:srgbClr val="E8F3F1"/>
-                    </a:solidFill>
-                  </a:tcPr>
-                </a:tc>
-                <a:tc>
-                  <a:txBody>
-                    <a:bodyPr wrap="square"/>
-                    <a:lstStyle/>
-                    <a:p>
-                      <a:pPr algn="l"/>
-                      <a:r>
-                        <a:rPr sz="1100" b="0">
-                          <a:solidFill>
-                            <a:srgbClr val="1A2A33"/>
-                          </a:solidFill>
-                          <a:latin typeface="微软雅黑"/>
-                          <a:ea typeface="微软雅黑"/>
-                        </a:rPr>
-                        <a:t>毕业生</a:t>
-                      </a:r>
-                    </a:p>
-                  </a:txBody>
-                  <a:tcPr marL="54864" marR="54864" marT="27432" marB="27432">
-                    <a:solidFill>
-                      <a:srgbClr val="E8F3F1"/>
-                    </a:solidFill>
-                  </a:tcPr>
-                </a:tc>
-              </a:tr>
-              <a:tr h="594360">
-                <a:tc>
-                  <a:txBody>
-                    <a:bodyPr wrap="square"/>
-                    <a:lstStyle/>
-                    <a:p>
-                      <a:pPr algn="l"/>
-                      <a:r>
-                        <a:rPr sz="1100" b="0">
+                        <a:rPr sz="1200" b="0">
                           <a:solidFill>
                             <a:srgbClr val="1A2A33"/>
                           </a:solidFill>
@@ -6603,7 +6308,7 @@
                     <a:p>
                       <a:pPr algn="l"/>
                       <a:r>
-                        <a:rPr sz="1100" b="0">
+                        <a:rPr sz="1200" b="0">
                           <a:solidFill>
                             <a:srgbClr val="1A2A33"/>
                           </a:solidFill>
@@ -6627,7 +6332,7 @@
                     <a:p>
                       <a:pPr algn="l"/>
                       <a:r>
-                        <a:rPr sz="1100" b="0">
+                        <a:rPr sz="1200" b="0">
                           <a:solidFill>
                             <a:srgbClr val="1A2A33"/>
                           </a:solidFill>
@@ -6651,14 +6356,14 @@
                     <a:p>
                       <a:pPr algn="l"/>
                       <a:r>
-                        <a:rPr sz="1100" b="0">
+                        <a:rPr sz="1200" b="0">
                           <a:solidFill>
                             <a:srgbClr val="1A2A33"/>
                           </a:solidFill>
                           <a:latin typeface="微软雅黑"/>
                           <a:ea typeface="微软雅黑"/>
                         </a:rPr>
-                        <a:t>批量名额+定制证明</a:t>
+                        <a:t>批量名额+统一课题交付</a:t>
                       </a:r>
                     </a:p>
                   </a:txBody>
@@ -6675,7 +6380,7 @@
                     <a:p>
                       <a:pPr algn="l"/>
                       <a:r>
-                        <a:rPr sz="1100" b="0">
+                        <a:rPr sz="1200" b="0">
                           <a:solidFill>
                             <a:srgbClr val="1A2A33"/>
                           </a:solidFill>
@@ -6697,6 +6402,42 @@
           </a:graphicData>
         </a:graphic>
       </p:graphicFrame>
+      <p:sp>
+        <p:nvSpPr>
+          <p:cNvPr id="9" name="TextBox 8"/>
+          <p:cNvSpPr txBox="1"/>
+          <p:nvPr/>
+        </p:nvSpPr>
+        <p:spPr>
+          <a:xfrm>
+            <a:off x="457200" y="5394960"/>
+            <a:ext cx="11247120" cy="640080"/>
+          </a:xfrm>
+          <a:prstGeom prst="rect">
+            <a:avLst/>
+          </a:prstGeom>
+          <a:noFill/>
+        </p:spPr>
+        <p:txBody>
+          <a:bodyPr wrap="square" lIns="0" rIns="0" tIns="0" bIns="0" anchor="t">
+            <a:spAutoFit/>
+          </a:bodyPr>
+          <a:lstStyle/>
+          <a:p>
+            <a:pPr algn="l"/>
+            <a:r>
+              <a:rPr sz="1400" b="1">
+                <a:solidFill>
+                  <a:srgbClr val="C06A2F"/>
+                </a:solidFill>
+                <a:latin typeface="微软雅黑"/>
+                <a:ea typeface="微软雅黑"/>
+              </a:rPr>
+              <a:t>明确不做：任何形式的低价「开证明 / 盖章证明 / 申报邮箱单独售卖」产品。</a:t>
+            </a:r>
+          </a:p>
+        </p:txBody>
+      </p:sp>
     </p:spTree>
   </p:cSld>
   <p:clrMapOvr>
@@ -7116,7 +6857,7 @@
                 <a:latin typeface="微软雅黑"/>
                 <a:ea typeface="微软雅黑"/>
               </a:rPr>
-              <a:t>•  以「证明可信度 × 品牌背书 × 辅导强度」三维定价</a:t>
+              <a:t>•  以「企业品牌 × 课题真实度 × 辅导强度」三维定价</a:t>
             </a:r>
           </a:p>
           <a:p>
@@ -7133,7 +6874,7 @@
                 <a:latin typeface="微软雅黑"/>
                 <a:ea typeface="微软雅黑"/>
               </a:rPr>
-              <a:t>•  公益线做漏斗入口，商业线贡献 ≥ 75% 毛利</a:t>
+              <a:t>•  全部收入来自商业/就业高价值档</a:t>
             </a:r>
           </a:p>
           <a:p>
@@ -7533,7 +7274,7 @@
                 <a:latin typeface="微软雅黑"/>
                 <a:ea typeface="微软雅黑"/>
               </a:rPr>
-              <a:t>•  升级包：公益 → 商业进阶转化率目标 15–25%</a:t>
+              <a:t>•  标准档 → 进阶通道升级率目标 20–30%</a:t>
             </a:r>
           </a:p>
           <a:p>
@@ -7550,7 +7291,7 @@
                 <a:latin typeface="微软雅黑"/>
                 <a:ea typeface="微软雅黑"/>
               </a:rPr>
-              <a:t>•  增值：简历/文书/面试模拟单卖或打包</a:t>
+              <a:t>•  增值：推荐信/面试模拟仅项目内加购</a:t>
             </a:r>
           </a:p>
           <a:p>
@@ -7567,7 +7308,7 @@
                 <a:latin typeface="微软雅黑"/>
                 <a:ea typeface="微软雅黑"/>
               </a:rPr>
-              <a:t>•  B 端：学校/留学机构年度框架协议</a:t>
+              <a:t>•  B 端：学校/机构年度框架协议（仍走高价值档）</a:t>
             </a:r>
           </a:p>
         </p:txBody>
@@ -7733,7 +7474,7 @@
                 <a:latin typeface="微软雅黑"/>
                 <a:ea typeface="微软雅黑"/>
               </a:rPr>
-              <a:t>•  定金 30% → 开营 40% → 结业证明出具 30%</a:t>
+              <a:t>•  定金 30% → 企业确认接收 40% → 结业交付 30%</a:t>
             </a:r>
           </a:p>
           <a:p>
@@ -7945,7 +7686,7 @@
                 <a:latin typeface="微软雅黑"/>
                 <a:ea typeface="微软雅黑"/>
               </a:rPr>
-              <a:t>保守 / 基准 / 乐观三情景，详见 Excel</a:t>
+              <a:t>取消开证明后：人数可少、客单更高 —— 详见 Excel</a:t>
             </a:r>
           </a:p>
         </p:txBody>
@@ -8241,7 +7982,7 @@
                           <a:latin typeface="微软雅黑"/>
                           <a:ea typeface="微软雅黑"/>
                         </a:rPr>
-                        <a:t>120</a:t>
+                        <a:t>100</a:t>
                       </a:r>
                     </a:p>
                   </a:txBody>
@@ -8265,7 +8006,7 @@
                           <a:latin typeface="微软雅黑"/>
                           <a:ea typeface="微软雅黑"/>
                         </a:rPr>
-                        <a:t>4,500</a:t>
+                        <a:t>7,500</a:t>
                       </a:r>
                     </a:p>
                   </a:txBody>
@@ -8289,7 +8030,7 @@
                           <a:latin typeface="微软雅黑"/>
                           <a:ea typeface="微软雅黑"/>
                         </a:rPr>
-                        <a:t>54</a:t>
+                        <a:t>75</a:t>
                       </a:r>
                     </a:p>
                   </a:txBody>
@@ -8313,7 +8054,7 @@
                           <a:latin typeface="微软雅黑"/>
                           <a:ea typeface="微软雅黑"/>
                         </a:rPr>
-                        <a:t>32%</a:t>
+                        <a:t>35%</a:t>
                       </a:r>
                     </a:p>
                   </a:txBody>
@@ -8337,7 +8078,7 @@
                           <a:latin typeface="微软雅黑"/>
                           <a:ea typeface="微软雅黑"/>
                         </a:rPr>
-                        <a:t>17.3</a:t>
+                        <a:t>26.3</a:t>
                       </a:r>
                     </a:p>
                   </a:txBody>
@@ -8387,7 +8128,7 @@
                           <a:latin typeface="微软雅黑"/>
                           <a:ea typeface="微软雅黑"/>
                         </a:rPr>
-                        <a:t>220</a:t>
+                        <a:t>200</a:t>
                       </a:r>
                     </a:p>
                   </a:txBody>
@@ -8411,7 +8152,7 @@
                           <a:latin typeface="微软雅黑"/>
                           <a:ea typeface="微软雅黑"/>
                         </a:rPr>
-                        <a:t>5,800</a:t>
+                        <a:t>8,240</a:t>
                       </a:r>
                     </a:p>
                   </a:txBody>
@@ -8435,7 +8176,7 @@
                           <a:latin typeface="微软雅黑"/>
                           <a:ea typeface="微软雅黑"/>
                         </a:rPr>
-                        <a:t>127.6</a:t>
+                        <a:t>164.8</a:t>
                       </a:r>
                     </a:p>
                   </a:txBody>
@@ -8483,7 +8224,7 @@
                           <a:latin typeface="微软雅黑"/>
                           <a:ea typeface="微软雅黑"/>
                         </a:rPr>
-                        <a:t>48.5</a:t>
+                        <a:t>62.6</a:t>
                       </a:r>
                     </a:p>
                   </a:txBody>
@@ -8533,7 +8274,7 @@
                           <a:latin typeface="微软雅黑"/>
                           <a:ea typeface="微软雅黑"/>
                         </a:rPr>
-                        <a:t>360</a:t>
+                        <a:t>300</a:t>
                       </a:r>
                     </a:p>
                   </a:txBody>
@@ -8557,7 +8298,7 @@
                           <a:latin typeface="微软雅黑"/>
                           <a:ea typeface="微软雅黑"/>
                         </a:rPr>
-                        <a:t>6,500</a:t>
+                        <a:t>9,000</a:t>
                       </a:r>
                     </a:p>
                   </a:txBody>
@@ -8581,7 +8322,7 @@
                           <a:latin typeface="微软雅黑"/>
                           <a:ea typeface="微软雅黑"/>
                         </a:rPr>
-                        <a:t>234</a:t>
+                        <a:t>270</a:t>
                       </a:r>
                     </a:p>
                   </a:txBody>
@@ -8629,7 +8370,7 @@
                           <a:latin typeface="微软雅黑"/>
                           <a:ea typeface="微软雅黑"/>
                         </a:rPr>
-                        <a:t>98.3</a:t>
+                        <a:t>113.4</a:t>
                       </a:r>
                     </a:p>
                   </a:txBody>
@@ -8679,7 +8420,7 @@
                 <a:latin typeface="微软雅黑"/>
                 <a:ea typeface="微软雅黑"/>
               </a:rPr>
-              <a:t>•  结构假设（基准）：公益线 40% 人数 / 约 12% 收入；商业线 50% 人数 / 约 70% 收入；就业包 10% 人数 / 约 18% 收入</a:t>
+              <a:t>•  结构假设（基准）：商业标准 50% / 进阶通道 30% / 就业包 20%；均客单约 8,240 元</a:t>
             </a:r>
           </a:p>
           <a:p>
@@ -8696,7 +8437,7 @@
                 <a:latin typeface="微软雅黑"/>
                 <a:ea typeface="微软雅黑"/>
               </a:rPr>
-              <a:t>•  盈亏平衡粗算：固定成本约 28–35 万/年（运营 2–3 人 + 平台 + 合规），基准情景可覆盖并实现盈余</a:t>
+              <a:t>•  盈亏平衡粗算：固定成本约 28–35 万/年；取消低价档后基准情景毛利更厚，更易覆盖固定成本</a:t>
             </a:r>
           </a:p>
           <a:p>
@@ -8713,7 +8454,7 @@
                 <a:latin typeface="微软雅黑"/>
                 <a:ea typeface="微软雅黑"/>
               </a:rPr>
-              <a:t>•  关键敏感因子：大厂通道成本、获客 CAC、公益→商业转化率；Excel 提供可调参数表</a:t>
+              <a:t>•  关键敏感因子：企业通道成本、获客 CAC、标准→进阶升级率；Excel 提供可调参数表</a:t>
             </a:r>
           </a:p>
         </p:txBody>
@@ -9161,7 +8902,7 @@
                           <a:latin typeface="微软雅黑"/>
                           <a:ea typeface="微软雅黑"/>
                         </a:rPr>
-                        <a:t>产品封装、证明模板、合规话术、官网/表单</a:t>
+                        <a:t>高价值三档产品封装、合规话术、官网/表单</a:t>
                       </a:r>
                     </a:p>
                   </a:txBody>
@@ -9185,7 +8926,7 @@
                           <a:latin typeface="微软雅黑"/>
                           <a:ea typeface="微软雅黑"/>
                         </a:rPr>
-                        <a:t>MVP 上线</a:t>
+                        <a:t>MVP 上线（无开证明档）</a:t>
                       </a:r>
                     </a:p>
                   </a:txBody>
@@ -9259,7 +9000,7 @@
                           <a:latin typeface="微软雅黑"/>
                           <a:ea typeface="微软雅黑"/>
                         </a:rPr>
-                        <a:t>签约科技公司 5–8 家，确认导师池</a:t>
+                        <a:t>签约上海 AI/具身智能 5–8 家，确认导师池</a:t>
                       </a:r>
                     </a:p>
                   </a:txBody>
@@ -9357,7 +9098,7 @@
                           <a:latin typeface="微软雅黑"/>
                           <a:ea typeface="微软雅黑"/>
                         </a:rPr>
-                        <a:t>留学机构/高校社团渠道试点，公益线放量</a:t>
+                        <a:t>高校社团/机构渠道试点，标准档开营</a:t>
                       </a:r>
                     </a:p>
                   </a:txBody>
@@ -9381,7 +9122,7 @@
                           <a:latin typeface="微软雅黑"/>
                           <a:ea typeface="微软雅黑"/>
                         </a:rPr>
-                        <a:t>首批 40 人开营</a:t>
+                        <a:t>首批 30 人开营</a:t>
                       </a:r>
                     </a:p>
                   </a:txBody>
@@ -9455,7 +9196,7 @@
                           <a:latin typeface="微软雅黑"/>
                           <a:ea typeface="微软雅黑"/>
                         </a:rPr>
-                        <a:t>大厂通道营首期，收集案例与口碑</a:t>
+                        <a:t>AI/头部通道营首期，收集案例与口碑</a:t>
                       </a:r>
                     </a:p>
                   </a:txBody>
@@ -9479,7 +9220,7 @@
                           <a:latin typeface="微软雅黑"/>
                           <a:ea typeface="微软雅黑"/>
                         </a:rPr>
-                        <a:t>付费累计 100 人</a:t>
+                        <a:t>付费累计 80 人</a:t>
                       </a:r>
                     </a:p>
                   </a:txBody>
@@ -9863,7 +9604,7 @@
                 <a:latin typeface="微软雅黑"/>
                 <a:ea typeface="微软雅黑"/>
               </a:rPr>
-              <a:t>先守住可信，再谈规模</a:t>
+              <a:t>先守住真实课题与品牌，再谈规模</a:t>
             </a:r>
           </a:p>
         </p:txBody>
@@ -10109,7 +9850,7 @@
                 <a:latin typeface="微软雅黑"/>
                 <a:ea typeface="微软雅黑"/>
               </a:rPr>
-              <a:t>•  虚假证明风险 → 真实任务+编号核验+抽查</a:t>
+              <a:t>•  企业合作不稳定 → 多供应商池+备选课题</a:t>
             </a:r>
           </a:p>
           <a:p>
@@ -10126,7 +9867,7 @@
                 <a:latin typeface="微软雅黑"/>
                 <a:ea typeface="微软雅黑"/>
               </a:rPr>
-              <a:t>•  企业合作不稳定 → 多供应商池+备选课题</a:t>
+              <a:t>•  价格战/水项目竞争 → 强调真实课题与成果物</a:t>
             </a:r>
           </a:p>
           <a:p>
@@ -10143,7 +9884,7 @@
                 <a:latin typeface="微软雅黑"/>
                 <a:ea typeface="微软雅黑"/>
               </a:rPr>
-              <a:t>•  价格战/水项目竞争 → 强调可核验与成果物</a:t>
+              <a:t>•  退费与纠纷 → 分期交付与服务协议</a:t>
             </a:r>
           </a:p>
           <a:p>
@@ -10160,7 +9901,7 @@
                 <a:latin typeface="微软雅黑"/>
                 <a:ea typeface="微软雅黑"/>
               </a:rPr>
-              <a:t>•  退费与纠纷 → 分期交付与服务协议</a:t>
+              <a:t>•  数据与未成年人合规 → 隐私告知与监护人同意</a:t>
             </a:r>
           </a:p>
           <a:p>
@@ -10177,7 +9918,7 @@
                 <a:latin typeface="微软雅黑"/>
                 <a:ea typeface="微软雅黑"/>
               </a:rPr>
-              <a:t>•  数据与未成年人合规 → 隐私告知与监护人同意</a:t>
+              <a:t>•  品牌方名称使用不当 → 法务审核对外话术</a:t>
             </a:r>
           </a:p>
         </p:txBody>
@@ -10343,7 +10084,7 @@
                 <a:latin typeface="微软雅黑"/>
                 <a:ea typeface="微软雅黑"/>
               </a:rPr>
-              <a:t>•  需求真实：三类人群痛点清晰且付费场景成立</a:t>
+              <a:t>•  取消开证明：避免低价高风险业务</a:t>
             </a:r>
           </a:p>
           <a:p>
@@ -10360,7 +10101,7 @@
                 <a:latin typeface="微软雅黑"/>
                 <a:ea typeface="微软雅黑"/>
               </a:rPr>
-              <a:t>•  供给可建：科技公司+线上公益可快速起盘</a:t>
+              <a:t>•  需求真实：三类人群仍可通过高价值档满足</a:t>
             </a:r>
           </a:p>
           <a:p>
@@ -10377,7 +10118,7 @@
                 <a:latin typeface="微软雅黑"/>
                 <a:ea typeface="微软雅黑"/>
               </a:rPr>
-              <a:t>•  盈利路径清晰：商业线扛利润，公益线扛规模</a:t>
+              <a:t>•  盈利路径更清晰：客单提升、毛利更厚</a:t>
             </a:r>
           </a:p>
           <a:p>
@@ -10411,7 +10152,7 @@
                 <a:latin typeface="微软雅黑"/>
                 <a:ea typeface="微软雅黑"/>
               </a:rPr>
-              <a:t>•  配套：使用 Excel 表做报价、清单与测算跟踪</a:t>
+              <a:t>•  配套：Excel 报价/清单/测算已同步调整</a:t>
             </a:r>
           </a:p>
         </p:txBody>
@@ -11197,7 +10938,7 @@
                 <a:latin typeface="微软雅黑"/>
                 <a:ea typeface="微软雅黑"/>
               </a:rPr>
-              <a:t>五、公益类实习与增值服务</a:t>
+              <a:t>五、战略取舍：取消开证明业务</a:t>
             </a:r>
           </a:p>
         </p:txBody>
@@ -12099,7 +11840,7 @@
                 <a:latin typeface="微软雅黑"/>
                 <a:ea typeface="微软雅黑"/>
               </a:rPr>
-              <a:t>•  公益/线上实习质量参差，证明可信度低</a:t>
+              <a:t>•  低价「开证明」业务风险高、利润薄</a:t>
             </a:r>
           </a:p>
         </p:txBody>
@@ -12282,7 +12023,7 @@
                 <a:latin typeface="微软雅黑"/>
                 <a:ea typeface="微软雅黑"/>
               </a:rPr>
-              <a:t>•  商业与公益项目如何组合供给</a:t>
+              <a:t>•  高价值商业档如何定价与供给</a:t>
             </a:r>
           </a:p>
           <a:p>
@@ -13040,7 +12781,7 @@
                           <a:latin typeface="微软雅黑"/>
                           <a:ea typeface="微软雅黑"/>
                         </a:rPr>
-                        <a:t>实习证明、推荐信、项目报告</a:t>
+                        <a:t>真实企业课题经历与结业证明</a:t>
                       </a:r>
                     </a:p>
                   </a:txBody>
@@ -13162,7 +12903,7 @@
                           <a:latin typeface="微软雅黑"/>
                           <a:ea typeface="微软雅黑"/>
                         </a:rPr>
-                        <a:t>大厂/科技公司实习经历</a:t>
+                        <a:t>大厂/科技公司项目实习经历</a:t>
                       </a:r>
                     </a:p>
                   </a:txBody>
@@ -13378,7 +13119,7 @@
                 <a:latin typeface="微软雅黑"/>
                 <a:ea typeface="微软雅黑"/>
               </a:rPr>
-              <a:t>共性需求：可验证的实习经历 + 可出具的证明材料 + 可写入简历/文书的项目成果</a:t>
+              <a:t>共性需求：可验证的真实课题经历 + 结业证明（作为交付物，不单独售卖）+ 可写入简历/文书的项目成果</a:t>
             </a:r>
           </a:p>
           <a:p>
@@ -13391,7 +13132,7 @@
                 <a:latin typeface="微软雅黑"/>
                 <a:ea typeface="微软雅黑"/>
               </a:rPr>
-              <a:t>差异策略：高中生偏「证明与推荐」；大学生偏「品牌与技能」；毕业生偏「就业转化通道」</a:t>
+              <a:t>差异策略：高中生走商业项目档提升申请竞争力；大学生偏品牌与技能；毕业生偏就业转化通道</a:t>
             </a:r>
           </a:p>
         </p:txBody>
@@ -13883,7 +13624,7 @@
                 <a:latin typeface="微软雅黑"/>
                 <a:ea typeface="微软雅黑"/>
               </a:rPr>
-              <a:t>•  偏好：科技、研究辅助、公益、远程项目</a:t>
+              <a:t>•  偏好：科技、研究辅助、真实企业远程/混合项目</a:t>
             </a:r>
           </a:p>
           <a:p>
@@ -14066,7 +13807,7 @@
                 <a:latin typeface="微软雅黑"/>
                 <a:ea typeface="微软雅黑"/>
               </a:rPr>
-              <a:t>•  线上/混合实习，降低地域与时间门槛</a:t>
+              <a:t>•  进入商业项目档：上海 AI / 具身智能真实课题</a:t>
             </a:r>
           </a:p>
           <a:p>
@@ -14083,7 +13824,7 @@
                 <a:latin typeface="微软雅黑"/>
                 <a:ea typeface="微软雅黑"/>
               </a:rPr>
-              <a:t>•  标准化实习证明（含项目描述、时长、导师）</a:t>
+              <a:t>•  结业证明作为项目交付物（不单独开证明售卖）</a:t>
             </a:r>
           </a:p>
           <a:p>
@@ -14100,7 +13841,7 @@
                 <a:latin typeface="微软雅黑"/>
                 <a:ea typeface="微软雅黑"/>
               </a:rPr>
-              <a:t>•  协助撰写推荐信框架与导师背书流程</a:t>
+              <a:t>•  可选加购推荐信（仅限项目学员）</a:t>
             </a:r>
           </a:p>
           <a:p>
@@ -14117,7 +13858,7 @@
                 <a:latin typeface="微软雅黑"/>
                 <a:ea typeface="微软雅黑"/>
               </a:rPr>
-              <a:t>•  提供申报邮箱/材料清单模板</a:t>
+              <a:t>•  寒暑假 4–6 周项目节奏匹配申请季</a:t>
             </a:r>
           </a:p>
           <a:p>
@@ -14134,7 +13875,7 @@
                 <a:latin typeface="微软雅黑"/>
                 <a:ea typeface="微软雅黑"/>
               </a:rPr>
-              <a:t>•  可选商业大厂体验营（付费增值）</a:t>
+              <a:t>•  强调可核验过程材料，拒绝「水经历」</a:t>
             </a:r>
           </a:p>
           <a:p>
@@ -14151,7 +13892,7 @@
                 <a:latin typeface="微软雅黑"/>
                 <a:ea typeface="微软雅黑"/>
               </a:rPr>
-              <a:t>•  合规声明：真实参与、可抽查核验</a:t>
+              <a:t>•  家长沟通重点：真实企业 + 成果物 + 合规</a:t>
             </a:r>
           </a:p>
         </p:txBody>
@@ -16122,7 +15863,7 @@
                 <a:latin typeface="微软雅黑"/>
                 <a:ea typeface="微软雅黑"/>
               </a:rPr>
-              <a:t>商业主业 + 公益补充，形成漏斗</a:t>
+              <a:t>只做高价值：真实企业课题 + 就业转化</a:t>
             </a:r>
           </a:p>
         </p:txBody>
@@ -16328,7 +16069,7 @@
                 <a:latin typeface="微软雅黑"/>
                 <a:ea typeface="微软雅黑"/>
               </a:rPr>
-              <a:t>A. 商业实习项目（利润中心）</a:t>
+              <a:t>A. 商业实习项目（主业）</a:t>
             </a:r>
           </a:p>
         </p:txBody>
@@ -16368,7 +16109,7 @@
                 <a:latin typeface="微软雅黑"/>
                 <a:ea typeface="微软雅黑"/>
               </a:rPr>
-              <a:t>•  世界 500 强 / 知名大厂合作通道</a:t>
+              <a:t>•  上海 AI / 具身智能 / 科技公司课题</a:t>
             </a:r>
           </a:p>
           <a:p>
@@ -16385,7 +16126,7 @@
                 <a:latin typeface="微软雅黑"/>
                 <a:ea typeface="微软雅黑"/>
               </a:rPr>
-              <a:t>•  机器人与科技公司实岗/课题</a:t>
+              <a:t>•  世界 500 强 / 知名大厂合作通道</a:t>
             </a:r>
           </a:p>
           <a:p>
@@ -16436,7 +16177,7 @@
                 <a:latin typeface="微软雅黑"/>
                 <a:ea typeface="微软雅黑"/>
               </a:rPr>
-              <a:t>•  盈利点：项目服务费、渠道差价、增值辅导</a:t>
+              <a:t>•  结业证明为交付物，不单独售卖</a:t>
             </a:r>
           </a:p>
           <a:p>
@@ -16453,7 +16194,7 @@
                 <a:latin typeface="微软雅黑"/>
                 <a:ea typeface="微软雅黑"/>
               </a:rPr>
-              <a:t>•  适用：大学生为主，优秀高中生/毕业生可选</a:t>
+              <a:t>•  适用：大学生为主，优秀高中生可选</a:t>
             </a:r>
           </a:p>
         </p:txBody>
@@ -16579,7 +16320,7 @@
                 <a:latin typeface="微软雅黑"/>
                 <a:ea typeface="微软雅黑"/>
               </a:rPr>
-              <a:t>B. 公益类实习项目（获客与补充）</a:t>
+              <a:t>B. 就业转化包（高价值出口）</a:t>
             </a:r>
           </a:p>
         </p:txBody>
@@ -16619,7 +16360,7 @@
                 <a:latin typeface="微软雅黑"/>
                 <a:ea typeface="微软雅黑"/>
               </a:rPr>
-              <a:t>•  线上实习 + 标准化证明盖章流程</a:t>
+              <a:t>•  毕业生 1–3 个月过渡实习</a:t>
             </a:r>
           </a:p>
           <a:p>
@@ -16636,7 +16377,7 @@
                 <a:latin typeface="微软雅黑"/>
                 <a:ea typeface="微软雅黑"/>
               </a:rPr>
-              <a:t>•  申报邮箱/链接与材料清单支持</a:t>
+              <a:t>•  内推线索 + 面试辅导 + 复盘</a:t>
             </a:r>
           </a:p>
           <a:p>
@@ -16653,7 +16394,7 @@
                 <a:latin typeface="微软雅黑"/>
                 <a:ea typeface="微软雅黑"/>
               </a:rPr>
-              <a:t>•  推荐信撰写协助（模板+润色）</a:t>
+              <a:t>•  作品集与结业证明一体交付</a:t>
             </a:r>
           </a:p>
           <a:p>
@@ -16670,7 +16411,7 @@
                 <a:latin typeface="微软雅黑"/>
                 <a:ea typeface="微软雅黑"/>
               </a:rPr>
-              <a:t>•  低价或免费入口，转化至商业套餐</a:t>
+              <a:t>•  推荐信仅作项目学员加购项</a:t>
             </a:r>
           </a:p>
           <a:p>
@@ -16687,7 +16428,7 @@
                 <a:latin typeface="微软雅黑"/>
                 <a:ea typeface="微软雅黑"/>
               </a:rPr>
-              <a:t>•  品牌社会责任与口碑建设</a:t>
+              <a:t>•  盈利点：高客单 + 转化口碑</a:t>
             </a:r>
           </a:p>
           <a:p>
@@ -16704,7 +16445,7 @@
                 <a:latin typeface="微软雅黑"/>
                 <a:ea typeface="微软雅黑"/>
               </a:rPr>
-              <a:t>•  适用：高中生申请、预算敏感大学生</a:t>
+              <a:t>•  不做低价开证明获客</a:t>
             </a:r>
           </a:p>
         </p:txBody>
